--- a/curso/pptx/S85.pptx
+++ b/curso/pptx/S85.pptx
@@ -4167,7 +4167,7 @@
                 </a:solidFill>
                 <a:latin typeface="Nunito Sans"/>
               </a:rPr>
-              <a:t>Al grupo de la familia de Kevin llega: «¡URGENTE! A los inmigrantes les dan miles de euros solo por llegar. Lo ha dicho un amigo que trabaja en el ayuntamiento. ¡Pásalo!».</a:t>
+              <a:t>Al grupo de la familia de un chico llega: «¡URGENTE! A los inmigrantes les dan miles de euros solo por llegar. Lo ha dicho un amigo que trabaja en el ayuntamiento. ¡Pásalo!».</a:t>
             </a:r>
           </a:p>
         </p:txBody>
@@ -4476,7 +4476,7 @@
                 </a:solidFill>
                 <a:latin typeface="Nunito Sans"/>
               </a:rPr>
-              <a:t>Aitor lee una noticia sobre un robo. El detenido nació en otro país. Aitor comenta: «Lo que yo decía: los de fuera vienen a robar».</a:t>
+              <a:t>Frase inventada, de las que se oyen por ahí. Vamos a ver por qué falla. Un chico lee una noticia sobre un robo. El detenido nació en otro país. Ese chico comenta: «Lo que yo decía: los de fuera vienen a robar».</a:t>
             </a:r>
           </a:p>
         </p:txBody>
@@ -4785,7 +4785,7 @@
                 </a:solidFill>
                 <a:latin typeface="Nunito Sans"/>
               </a:rPr>
-              <a:t>Naiara, harta de los comentarios contra los migrantes, escribe en un chat: «Pues los inmigrantes son todos buenísimos y muy trabajadores».</a:t>
+              <a:t>Una chica, harta de los comentarios contra los migrantes, escribe en un chat: «Pues los inmigrantes son todos buenísimos y muy trabajadores».</a:t>
             </a:r>
           </a:p>
         </p:txBody>
@@ -4833,7 +4833,7 @@
                 </a:solidFill>
                 <a:latin typeface="Nunito Sans"/>
               </a:rPr>
-              <a:t>Naiara defiende a los migrantes. ¿Está razonando bien?</a:t>
+              <a:t>Esa chica defiende a los migrantes. ¿Está razonando bien?</a:t>
             </a:r>
           </a:p>
           <a:p>

--- a/curso/pptx/S85.pptx
+++ b/curso/pptx/S85.pptx
@@ -23,6 +23,7 @@
     <p:sldId id="271" r:id="rId23"/>
     <p:sldId id="272" r:id="rId24"/>
     <p:sldId id="273" r:id="rId25"/>
+    <p:sldId id="274" r:id="rId26"/>
   </p:sldIdLst>
   <p:sldSz cx="12192000" cy="6858000" type="screen4x3"/>
   <p:notesSz cx="6858000" cy="9144000"/>
@@ -3536,7 +3537,7 @@
                 </a:solidFill>
                 <a:latin typeface="Nunito Sans"/>
               </a:rPr>
-              <a:t>PENSAMIENTO CRÍTICO · SESIÓN 85 · UNIDAD 19 · GLOCAL: CULTURAS Y MIGRACIONES</a:t>
+              <a:t>PENSAMIENTO CRÍTICO · SESIÓN 85 · UNIDAD 19 · MODAS, OCIO Y FUTURO</a:t>
             </a:r>
           </a:p>
         </p:txBody>
@@ -3575,7 +3576,7 @@
                 </a:solidFill>
                 <a:latin typeface="Fredoka"/>
               </a:rPr>
-              <a:t>Globalización y migraciones</a:t>
+              <a:t>Ocio, drogas y adicciones</a:t>
             </a:r>
           </a:p>
         </p:txBody>
@@ -3614,7 +3615,7 @@
                 </a:solidFill>
                 <a:latin typeface="Nunito Sans"/>
               </a:rPr>
-              <a:t>El mundo está cada vez más conectado y las personas siempre han migrado; sobre los migrantes circulan bulos y generalizaciones que hay que comprobar.</a:t>
+              <a:t>El ocio es tiempo libre elegido; una adicción es perder el control. Ante los mitos sobre drogas, pregunto: ¿cómo lo sabes y quién lo dice?</a:t>
             </a:r>
           </a:p>
         </p:txBody>
@@ -3679,7 +3680,7 @@
                 </a:solidFill>
                 <a:latin typeface="Nunito Sans"/>
               </a:rPr>
-              <a:t>BLOQUE 1 · UN MUNDO CONECTADO</a:t>
+              <a:t>BLOQUE 2 · MITOS Y PRESIÓN DEL GRUPO</a:t>
             </a:r>
           </a:p>
         </p:txBody>
@@ -3718,170 +3719,303 @@
                 </a:solidFill>
                 <a:latin typeface="Fredoka"/>
               </a:rPr>
-              <a:t>Los humanos siempre hemos migrado</a:t>
-            </a:r>
-          </a:p>
-        </p:txBody>
-      </p:sp>
-      <p:sp>
-        <p:nvSpPr>
-          <p:cNvPr id="4" name="TextBox 3"/>
-          <p:cNvSpPr txBox="1"/>
+              <a:t>Mitos frecuentes y lo que dicen las fuentes sanitarias</a:t>
+            </a:r>
+          </a:p>
+        </p:txBody>
+      </p:sp>
+      <p:graphicFrame>
+        <p:nvGraphicFramePr>
+          <p:cNvPr id="4" name="Table 3"/>
+          <p:cNvGraphicFramePr>
+            <a:graphicFrameLocks noGrp="1"/>
+          </p:cNvGraphicFramePr>
           <p:nvPr/>
-        </p:nvSpPr>
-        <p:spPr>
-          <a:xfrm>
-            <a:off x="640000" y="1650000"/>
-            <a:ext cx="10912000" cy="4808000"/>
-          </a:xfrm>
-          <a:prstGeom prst="rect">
-            <a:avLst/>
-          </a:prstGeom>
-          <a:noFill/>
-        </p:spPr>
-        <p:txBody>
-          <a:bodyPr wrap="square">
-            <a:spAutoFit/>
-          </a:bodyPr>
-          <a:lstStyle/>
-          <a:p>
-            <a:pPr>
-              <a:spcAft>
-                <a:spcPts val="1260"/>
-              </a:spcAft>
-            </a:pPr>
-            <a:r>
-              <a:rPr sz="2800" b="1">
-                <a:solidFill>
-                  <a:srgbClr val="E8793A"/>
-                </a:solidFill>
-                <a:latin typeface="Nunito Sans"/>
-              </a:rPr>
-              <a:t>• </a:t>
-            </a:r>
-            <a:r>
-              <a:rPr sz="2800" b="0">
-                <a:solidFill>
-                  <a:srgbClr val="1F2A44"/>
-                </a:solidFill>
-                <a:latin typeface="Nunito Sans"/>
-              </a:rPr>
-              <a:t>Nuestra especie nació en </a:t>
-            </a:r>
-            <a:r>
-              <a:rPr sz="2800" b="1">
-                <a:solidFill>
-                  <a:srgbClr val="1F2A44"/>
-                </a:solidFill>
-                <a:latin typeface="Nunito Sans"/>
-              </a:rPr>
-              <a:t>África</a:t>
-            </a:r>
-            <a:r>
-              <a:rPr sz="2800" b="0">
-                <a:solidFill>
-                  <a:srgbClr val="1F2A44"/>
-                </a:solidFill>
-                <a:latin typeface="Nunito Sans"/>
-              </a:rPr>
-              <a:t> y desde allí llegó a todo el planeta.</a:t>
-            </a:r>
-          </a:p>
-          <a:p>
-            <a:pPr>
-              <a:spcAft>
-                <a:spcPts val="1260"/>
-              </a:spcAft>
-            </a:pPr>
-            <a:r>
-              <a:rPr sz="2800" b="1">
-                <a:solidFill>
-                  <a:srgbClr val="E8793A"/>
-                </a:solidFill>
-                <a:latin typeface="Nunito Sans"/>
-              </a:rPr>
-              <a:t>• </a:t>
-            </a:r>
-            <a:r>
-              <a:rPr sz="2800" b="0">
-                <a:solidFill>
-                  <a:srgbClr val="1F2A44"/>
-                </a:solidFill>
-                <a:latin typeface="Nunito Sans"/>
-              </a:rPr>
-              <a:t>Siglos XIX y XX: muchos vascos emigraron a </a:t>
-            </a:r>
-            <a:r>
-              <a:rPr sz="2800" b="1">
-                <a:solidFill>
-                  <a:srgbClr val="1F2A44"/>
-                </a:solidFill>
-                <a:latin typeface="Nunito Sans"/>
-              </a:rPr>
-              <a:t>América</a:t>
-            </a:r>
-            <a:r>
-              <a:rPr sz="2800" b="0">
-                <a:solidFill>
-                  <a:srgbClr val="1F2A44"/>
-                </a:solidFill>
-                <a:latin typeface="Nunito Sans"/>
-              </a:rPr>
-              <a:t> (Argentina, Uruguay, Chile, Estados Unidos…).</a:t>
-            </a:r>
-          </a:p>
-          <a:p>
-            <a:pPr>
-              <a:spcAft>
-                <a:spcPts val="1260"/>
-              </a:spcAft>
-            </a:pPr>
-            <a:r>
-              <a:rPr sz="2800" b="1">
-                <a:solidFill>
-                  <a:srgbClr val="E8793A"/>
-                </a:solidFill>
-                <a:latin typeface="Nunito Sans"/>
-              </a:rPr>
-              <a:t>• </a:t>
-            </a:r>
-            <a:r>
-              <a:rPr sz="2800" b="0">
-                <a:solidFill>
-                  <a:srgbClr val="1F2A44"/>
-                </a:solidFill>
-                <a:latin typeface="Nunito Sans"/>
-              </a:rPr>
-              <a:t>Siglo XX: a Bilbao llegó gente de toda España a trabajar en fábricas.</a:t>
-            </a:r>
-          </a:p>
-          <a:p>
-            <a:pPr>
-              <a:spcAft>
-                <a:spcPts val="1260"/>
-              </a:spcAft>
-            </a:pPr>
-            <a:r>
-              <a:rPr sz="2800" b="1">
-                <a:solidFill>
-                  <a:srgbClr val="E8793A"/>
-                </a:solidFill>
-                <a:latin typeface="Nunito Sans"/>
-              </a:rPr>
-              <a:t>• </a:t>
-            </a:r>
-            <a:r>
-              <a:rPr sz="2800" b="0">
-                <a:solidFill>
-                  <a:srgbClr val="1F2A44"/>
-                </a:solidFill>
-                <a:latin typeface="Nunito Sans"/>
-              </a:rPr>
-              <a:t>Hoy llega gente de todo el mundo, y también se van jóvenes vascos.</a:t>
-            </a:r>
-          </a:p>
-        </p:txBody>
-      </p:sp>
+        </p:nvGraphicFramePr>
+        <p:xfrm>
+          <a:off x="640000" y="1700000"/>
+          <a:ext cx="10912000" cy="3000000"/>
+        </p:xfrm>
+        <a:graphic>
+          <a:graphicData uri="http://schemas.openxmlformats.org/drawingml/2006/table">
+            <a:tbl>
+              <a:tblPr firstRow="1" bandRow="1">
+                <a:tableStyleId>{5C22544A-7EE6-4342-B048-85BDC9FD1C3A}</a:tableStyleId>
+              </a:tblPr>
+              <a:tblGrid>
+                <a:gridCol w="5456000"/>
+                <a:gridCol w="5456000"/>
+              </a:tblGrid>
+              <a:tr h="600000">
+                <a:tc>
+                  <a:txBody>
+                    <a:bodyPr/>
+                    <a:lstStyle/>
+                    <a:p>
+                      <a:r>
+                        <a:rPr sz="2000" b="1">
+                          <a:solidFill>
+                            <a:srgbClr val="FBF7EF"/>
+                          </a:solidFill>
+                          <a:latin typeface="Fredoka"/>
+                        </a:rPr>
+                        <a:t>Mito</a:t>
+                      </a:r>
+                    </a:p>
+                  </a:txBody>
+                  <a:tcPr>
+                    <a:solidFill>
+                      <a:srgbClr val="1F2A44"/>
+                    </a:solidFill>
+                  </a:tcPr>
+                </a:tc>
+                <a:tc>
+                  <a:txBody>
+                    <a:bodyPr/>
+                    <a:lstStyle/>
+                    <a:p>
+                      <a:r>
+                        <a:rPr sz="2000" b="1">
+                          <a:solidFill>
+                            <a:srgbClr val="FBF7EF"/>
+                          </a:solidFill>
+                          <a:latin typeface="Fredoka"/>
+                        </a:rPr>
+                        <a:t>Lo que dicen Sanidad y la OMS</a:t>
+                      </a:r>
+                    </a:p>
+                  </a:txBody>
+                  <a:tcPr>
+                    <a:solidFill>
+                      <a:srgbClr val="1F2A44"/>
+                    </a:solidFill>
+                  </a:tcPr>
+                </a:tc>
+              </a:tr>
+              <a:tr h="600000">
+                <a:tc>
+                  <a:txBody>
+                    <a:bodyPr/>
+                    <a:lstStyle/>
+                    <a:p>
+                      <a:r>
+                        <a:rPr sz="2000" b="0">
+                          <a:solidFill>
+                            <a:srgbClr val="1F2A44"/>
+                          </a:solidFill>
+                          <a:latin typeface="Nunito Sans"/>
+                        </a:rPr>
+                        <a:t>«Vapear es solo vapor de agua»</a:t>
+                      </a:r>
+                    </a:p>
+                  </a:txBody>
+                  <a:tcPr>
+                    <a:solidFill>
+                      <a:srgbClr val="FFFFFF"/>
+                    </a:solidFill>
+                  </a:tcPr>
+                </a:tc>
+                <a:tc>
+                  <a:txBody>
+                    <a:bodyPr/>
+                    <a:lstStyle/>
+                    <a:p>
+                      <a:r>
+                        <a:rPr sz="2000" b="0">
+                          <a:solidFill>
+                            <a:srgbClr val="1F2A44"/>
+                          </a:solidFill>
+                          <a:latin typeface="Nunito Sans"/>
+                        </a:rPr>
+                        <a:t>Es un aerosol con sustancias químicas; la mayoría lleva </a:t>
+                      </a:r>
+                      <a:r>
+                        <a:rPr sz="2000" b="1">
+                          <a:solidFill>
+                            <a:srgbClr val="1F2A44"/>
+                          </a:solidFill>
+                          <a:latin typeface="Nunito Sans"/>
+                        </a:rPr>
+                        <a:t>nicotina</a:t>
+                      </a:r>
+                      <a:r>
+                        <a:rPr sz="2000" b="0">
+                          <a:solidFill>
+                            <a:srgbClr val="1F2A44"/>
+                          </a:solidFill>
+                          <a:latin typeface="Nunito Sans"/>
+                        </a:rPr>
+                        <a:t>, que engancha</a:t>
+                      </a:r>
+                    </a:p>
+                  </a:txBody>
+                  <a:tcPr>
+                    <a:solidFill>
+                      <a:srgbClr val="FFFFFF"/>
+                    </a:solidFill>
+                  </a:tcPr>
+                </a:tc>
+              </a:tr>
+              <a:tr h="600000">
+                <a:tc>
+                  <a:txBody>
+                    <a:bodyPr/>
+                    <a:lstStyle/>
+                    <a:p>
+                      <a:r>
+                        <a:rPr sz="2000" b="0">
+                          <a:solidFill>
+                            <a:srgbClr val="1F2A44"/>
+                          </a:solidFill>
+                          <a:latin typeface="Nunito Sans"/>
+                        </a:rPr>
+                        <a:t>«Es natural, así que no hace daño» (cannabis)</a:t>
+                      </a:r>
+                    </a:p>
+                  </a:txBody>
+                  <a:tcPr>
+                    <a:solidFill>
+                      <a:srgbClr val="EAF0F7"/>
+                    </a:solidFill>
+                  </a:tcPr>
+                </a:tc>
+                <a:tc>
+                  <a:txBody>
+                    <a:bodyPr/>
+                    <a:lstStyle/>
+                    <a:p>
+                      <a:r>
+                        <a:rPr sz="2000" b="0">
+                          <a:solidFill>
+                            <a:srgbClr val="1F2A44"/>
+                          </a:solidFill>
+                          <a:latin typeface="Nunito Sans"/>
+                        </a:rPr>
+                        <a:t>Natural no es seguro. En adolescentes puede afectar a memoria y atención</a:t>
+                      </a:r>
+                    </a:p>
+                  </a:txBody>
+                  <a:tcPr>
+                    <a:solidFill>
+                      <a:srgbClr val="EAF0F7"/>
+                    </a:solidFill>
+                  </a:tcPr>
+                </a:tc>
+              </a:tr>
+              <a:tr h="600000">
+                <a:tc>
+                  <a:txBody>
+                    <a:bodyPr/>
+                    <a:lstStyle/>
+                    <a:p>
+                      <a:r>
+                        <a:rPr sz="2000" b="0">
+                          <a:solidFill>
+                            <a:srgbClr val="1F2A44"/>
+                          </a:solidFill>
+                          <a:latin typeface="Nunito Sans"/>
+                        </a:rPr>
+                        <a:t>«Un poco de alcohol a mi edad no pasa nada»</a:t>
+                      </a:r>
+                    </a:p>
+                  </a:txBody>
+                  <a:tcPr>
+                    <a:solidFill>
+                      <a:srgbClr val="FFFFFF"/>
+                    </a:solidFill>
+                  </a:tcPr>
+                </a:tc>
+                <a:tc>
+                  <a:txBody>
+                    <a:bodyPr/>
+                    <a:lstStyle/>
+                    <a:p>
+                      <a:r>
+                        <a:rPr sz="2000" b="0">
+                          <a:solidFill>
+                            <a:srgbClr val="1F2A44"/>
+                          </a:solidFill>
+                          <a:latin typeface="Nunito Sans"/>
+                        </a:rPr>
+                        <a:t>Para menores, Sanidad recomienda </a:t>
+                      </a:r>
+                      <a:r>
+                        <a:rPr sz="2000" b="1">
+                          <a:solidFill>
+                            <a:srgbClr val="1F2A44"/>
+                          </a:solidFill>
+                          <a:latin typeface="Nunito Sans"/>
+                        </a:rPr>
+                        <a:t>cero</a:t>
+                      </a:r>
+                      <a:r>
+                        <a:rPr sz="2000" b="0">
+                          <a:solidFill>
+                            <a:srgbClr val="1F2A44"/>
+                          </a:solidFill>
+                          <a:latin typeface="Nunito Sans"/>
+                        </a:rPr>
+                        <a:t>: el cerebro aún se está formando</a:t>
+                      </a:r>
+                    </a:p>
+                  </a:txBody>
+                  <a:tcPr>
+                    <a:solidFill>
+                      <a:srgbClr val="FFFFFF"/>
+                    </a:solidFill>
+                  </a:tcPr>
+                </a:tc>
+              </a:tr>
+              <a:tr h="600000">
+                <a:tc>
+                  <a:txBody>
+                    <a:bodyPr/>
+                    <a:lstStyle/>
+                    <a:p>
+                      <a:r>
+                        <a:rPr sz="2000" b="0">
+                          <a:solidFill>
+                            <a:srgbClr val="1F2A44"/>
+                          </a:solidFill>
+                          <a:latin typeface="Nunito Sans"/>
+                        </a:rPr>
+                        <a:t>«Si solo fumo en fiestas, no me engancho»</a:t>
+                      </a:r>
+                    </a:p>
+                  </a:txBody>
+                  <a:tcPr>
+                    <a:solidFill>
+                      <a:srgbClr val="EAF0F7"/>
+                    </a:solidFill>
+                  </a:tcPr>
+                </a:tc>
+                <a:tc>
+                  <a:txBody>
+                    <a:bodyPr/>
+                    <a:lstStyle/>
+                    <a:p>
+                      <a:r>
+                        <a:rPr sz="2000" b="0">
+                          <a:solidFill>
+                            <a:srgbClr val="1F2A44"/>
+                          </a:solidFill>
+                          <a:latin typeface="Nunito Sans"/>
+                        </a:rPr>
+                        <a:t>La nicotina es muy adictiva: puedes engancharte sin fumar cada día</a:t>
+                      </a:r>
+                    </a:p>
+                  </a:txBody>
+                  <a:tcPr>
+                    <a:solidFill>
+                      <a:srgbClr val="EAF0F7"/>
+                    </a:solidFill>
+                  </a:tcPr>
+                </a:tc>
+              </a:tr>
+            </a:tbl>
+          </a:graphicData>
+        </a:graphic>
+      </p:graphicFrame>
     </p:spTree>
   </p:cSld>
   <p:clrMapOvr>
@@ -3896,7 +4030,7 @@
     <p:bg>
       <p:bgPr>
         <a:solidFill>
-          <a:srgbClr val="1F2A44"/>
+          <a:srgbClr val="FBF7EF"/>
         </a:solidFill>
         <a:effectLst/>
       </p:bgPr>
@@ -3916,8 +4050,8 @@
         </p:nvSpPr>
         <p:spPr>
           <a:xfrm>
-            <a:off x="640000" y="2300000"/>
-            <a:ext cx="10912000" cy="500000"/>
+            <a:off x="640000" y="380000"/>
+            <a:ext cx="10912000" cy="420000"/>
           </a:xfrm>
           <a:prstGeom prst="rect">
             <a:avLst/>
@@ -3932,17 +4066,17 @@
           <a:p>
             <a:pPr>
               <a:spcAft>
-                <a:spcPts val="810"/>
-              </a:spcAft>
-            </a:pPr>
-            <a:r>
-              <a:rPr sz="1800" b="1">
-                <a:solidFill>
-                  <a:srgbClr val="F4B183"/>
-                </a:solidFill>
-                <a:latin typeface="Nunito Sans"/>
-              </a:rPr>
-              <a:t>BLOQUE 2</a:t>
+                <a:spcPts val="630"/>
+              </a:spcAft>
+            </a:pPr>
+            <a:r>
+              <a:rPr sz="1400" b="1">
+                <a:solidFill>
+                  <a:srgbClr val="E8793A"/>
+                </a:solidFill>
+                <a:latin typeface="Nunito Sans"/>
+              </a:rPr>
+              <a:t>BLOQUE 2 · MITOS Y PRESIÓN DEL GRUPO</a:t>
             </a:r>
           </a:p>
         </p:txBody>
@@ -3955,7 +4089,7 @@
         </p:nvSpPr>
         <p:spPr>
           <a:xfrm>
-            <a:off x="640000" y="2800000"/>
+            <a:off x="640000" y="760000"/>
             <a:ext cx="10912000" cy="800000"/>
           </a:xfrm>
           <a:prstGeom prst="rect">
@@ -3971,17 +4105,222 @@
           <a:p>
             <a:pPr>
               <a:spcAft>
-                <a:spcPts val="2160"/>
-              </a:spcAft>
-            </a:pPr>
-            <a:r>
-              <a:rPr sz="4800" b="1">
-                <a:solidFill>
-                  <a:srgbClr val="FBF7EF"/>
+                <a:spcPts val="1710"/>
+              </a:spcAft>
+            </a:pPr>
+            <a:r>
+              <a:rPr sz="3800" b="1">
+                <a:solidFill>
+                  <a:srgbClr val="1F2A44"/>
                 </a:solidFill>
                 <a:latin typeface="Fredoka"/>
               </a:rPr>
-              <a:t>Casos resueltos</a:t>
+              <a:t>Caso 1 · El vídeo del vaper</a:t>
+            </a:r>
+          </a:p>
+        </p:txBody>
+      </p:sp>
+      <p:sp>
+        <p:nvSpPr>
+          <p:cNvPr id="4" name="Rectangle 3"/>
+          <p:cNvSpPr/>
+          <p:nvPr/>
+        </p:nvSpPr>
+        <p:spPr>
+          <a:xfrm>
+            <a:off x="640000" y="1600000"/>
+            <a:ext cx="10912000" cy="1100000"/>
+          </a:xfrm>
+          <a:prstGeom prst="rect">
+            <a:avLst/>
+          </a:prstGeom>
+          <a:solidFill>
+            <a:srgbClr val="FFFFFF"/>
+          </a:solidFill>
+          <a:ln>
+            <a:noFill/>
+          </a:ln>
+        </p:spPr>
+        <p:style>
+          <a:lnRef idx="1">
+            <a:schemeClr val="accent1"/>
+          </a:lnRef>
+          <a:fillRef idx="3">
+            <a:schemeClr val="accent1"/>
+          </a:fillRef>
+          <a:effectRef idx="2">
+            <a:schemeClr val="accent1"/>
+          </a:effectRef>
+          <a:fontRef idx="minor">
+            <a:schemeClr val="lt1"/>
+          </a:fontRef>
+        </p:style>
+        <p:txBody>
+          <a:bodyPr rtlCol="0" anchor="ctr"/>
+          <a:lstStyle/>
+          <a:p>
+            <a:pPr algn="ctr"/>
+          </a:p>
+        </p:txBody>
+      </p:sp>
+      <p:sp>
+        <p:nvSpPr>
+          <p:cNvPr id="5" name="TextBox 4"/>
+          <p:cNvSpPr txBox="1"/>
+          <p:nvPr/>
+        </p:nvSpPr>
+        <p:spPr>
+          <a:xfrm>
+            <a:off x="840000" y="1650000"/>
+            <a:ext cx="10512000" cy="1000000"/>
+          </a:xfrm>
+          <a:prstGeom prst="rect">
+            <a:avLst/>
+          </a:prstGeom>
+          <a:noFill/>
+        </p:spPr>
+        <p:txBody>
+          <a:bodyPr wrap="square" anchor="ctr">
+            <a:spAutoFit/>
+          </a:bodyPr>
+          <a:lstStyle/>
+          <a:p>
+            <a:pPr>
+              <a:spcAft>
+                <a:spcPts val="1170"/>
+              </a:spcAft>
+            </a:pPr>
+            <a:r>
+              <a:rPr sz="2600" b="1">
+                <a:solidFill>
+                  <a:srgbClr val="1F2A44"/>
+                </a:solidFill>
+                <a:latin typeface="Nunito Sans"/>
+              </a:rPr>
+              <a:t>El vídeo del principio: «Es solo vapor de agua con sabor a fresa». Lo publica una cuenta que vende vapers. (Ejemplo inventado.)</a:t>
+            </a:r>
+          </a:p>
+        </p:txBody>
+      </p:sp>
+      <p:sp>
+        <p:nvSpPr>
+          <p:cNvPr id="6" name="TextBox 5"/>
+          <p:cNvSpPr txBox="1"/>
+          <p:nvPr/>
+        </p:nvSpPr>
+        <p:spPr>
+          <a:xfrm>
+            <a:off x="640000" y="2900000"/>
+            <a:ext cx="10912000" cy="3500000"/>
+          </a:xfrm>
+          <a:prstGeom prst="rect">
+            <a:avLst/>
+          </a:prstGeom>
+          <a:noFill/>
+        </p:spPr>
+        <p:txBody>
+          <a:bodyPr wrap="square">
+            <a:spAutoFit/>
+          </a:bodyPr>
+          <a:lstStyle/>
+          <a:p>
+            <a:pPr>
+              <a:spcAft>
+                <a:spcPts val="1080"/>
+              </a:spcAft>
+            </a:pPr>
+            <a:r>
+              <a:rPr sz="2400" b="1">
+                <a:solidFill>
+                  <a:srgbClr val="E8793A"/>
+                </a:solidFill>
+                <a:latin typeface="Nunito Sans"/>
+              </a:rPr>
+              <a:t>1. </a:t>
+            </a:r>
+            <a:r>
+              <a:rPr sz="2400" b="0">
+                <a:solidFill>
+                  <a:srgbClr val="1F2A44"/>
+                </a:solidFill>
+                <a:latin typeface="Nunito Sans"/>
+              </a:rPr>
+              <a:t>¿Quién lo dice? Una cuenta que vende vapers. ¿Qué gana? Vender más (sesión 32).</a:t>
+            </a:r>
+          </a:p>
+          <a:p>
+            <a:pPr>
+              <a:spcAft>
+                <a:spcPts val="1080"/>
+              </a:spcAft>
+            </a:pPr>
+            <a:r>
+              <a:rPr sz="2400" b="1">
+                <a:solidFill>
+                  <a:srgbClr val="E8793A"/>
+                </a:solidFill>
+                <a:latin typeface="Nunito Sans"/>
+              </a:rPr>
+              <a:t>2. </a:t>
+            </a:r>
+            <a:r>
+              <a:rPr sz="2400" b="0">
+                <a:solidFill>
+                  <a:srgbClr val="1F2A44"/>
+                </a:solidFill>
+                <a:latin typeface="Nunito Sans"/>
+              </a:rPr>
+              <a:t>¿Cómo lo sabe? No da ninguna prueba: solo lo afirma.</a:t>
+            </a:r>
+          </a:p>
+          <a:p>
+            <a:pPr>
+              <a:spcAft>
+                <a:spcPts val="1080"/>
+              </a:spcAft>
+            </a:pPr>
+            <a:r>
+              <a:rPr sz="2400" b="1">
+                <a:solidFill>
+                  <a:srgbClr val="E8793A"/>
+                </a:solidFill>
+                <a:latin typeface="Nunito Sans"/>
+              </a:rPr>
+              <a:t>3. </a:t>
+            </a:r>
+            <a:r>
+              <a:rPr sz="2400" b="0">
+                <a:solidFill>
+                  <a:srgbClr val="1F2A44"/>
+                </a:solidFill>
+                <a:latin typeface="Nunito Sans"/>
+              </a:rPr>
+              <a:t>Contrasto con fuentes sanitarias, como el Ministerio de Sanidad o la OMS: dicen que no es solo vapor.</a:t>
+            </a:r>
+          </a:p>
+          <a:p>
+            <a:pPr>
+              <a:spcAft>
+                <a:spcPts val="1080"/>
+              </a:spcAft>
+            </a:pPr>
+            <a:r>
+              <a:rPr sz="2400" b="1">
+                <a:solidFill>
+                  <a:srgbClr val="E8793A"/>
+                </a:solidFill>
+                <a:latin typeface="Nunito Sans"/>
+              </a:rPr>
+              <a:t>4. </a:t>
+            </a:r>
+            <a:r>
+              <a:rPr sz="2400" b="0">
+                <a:solidFill>
+                  <a:srgbClr val="1F2A44"/>
+                </a:solidFill>
+                <a:latin typeface="Nunito Sans"/>
+              </a:rPr>
+              <a:t>Conclusión: el mito cae con las preguntas de siempre. No hace falta un sermón: hace falta mirar la fuente.</a:t>
             </a:r>
           </a:p>
         </p:txBody>
@@ -4046,7 +4385,7 @@
                 </a:solidFill>
                 <a:latin typeface="Nunito Sans"/>
               </a:rPr>
-              <a:t>BLOQUE 2 · CASOS RESUELTOS</a:t>
+              <a:t>BLOQUE 2 · MITOS Y PRESIÓN DEL GRUPO</a:t>
             </a:r>
           </a:p>
         </p:txBody>
@@ -4085,7 +4424,7 @@
                 </a:solidFill>
                 <a:latin typeface="Fredoka"/>
               </a:rPr>
-              <a:t>Caso 1 · Un mensaje en la familia</a:t>
+              <a:t>Caso 2 · «Si lo hace todo el mundo»</a:t>
             </a:r>
           </a:p>
         </p:txBody>
@@ -4167,7 +4506,7 @@
                 </a:solidFill>
                 <a:latin typeface="Nunito Sans"/>
               </a:rPr>
-              <a:t>Al grupo de la familia de un chico llega: «¡URGENTE! A los inmigrantes les dan miles de euros solo por llegar. Lo ha dicho un amigo que trabaja en el ayuntamiento. ¡Pásalo!».</a:t>
+              <a:t>En Aste Nagusia, alguien de la cuadrilla le pasa un vaper a un chico: «Venga, si lo hace todo el mundo». (Ejemplo inventado.)</a:t>
             </a:r>
           </a:p>
         </p:txBody>
@@ -4215,7 +4554,7 @@
                 </a:solidFill>
                 <a:latin typeface="Nunito Sans"/>
               </a:rPr>
-              <a:t>Tiene los ingredientes de un bulo (sesión 33): urgencia, emoción fuerte y fuente vaga.</a:t>
+              <a:t>Es una apelación a la mayoría (sesión 9): «si todos lo hacen, estará bien».</a:t>
             </a:r>
           </a:p>
           <a:p>
@@ -4240,7 +4579,25 @@
                 </a:solidFill>
                 <a:latin typeface="Nunito Sans"/>
               </a:rPr>
-              <a:t>¿Quién lo dice? «Un amigo». ¿Cómo lo sabe? No lo explica. No hay fuente fiable (sesión 31).</a:t>
+              <a:t>¿Es verdad? Muchos estudios encuentran que creemos que los demás consumen </a:t>
+            </a:r>
+            <a:r>
+              <a:rPr sz="2400" b="1">
+                <a:solidFill>
+                  <a:srgbClr val="1F2A44"/>
+                </a:solidFill>
+                <a:latin typeface="Nunito Sans"/>
+              </a:rPr>
+              <a:t>más</a:t>
+            </a:r>
+            <a:r>
+              <a:rPr sz="2400" b="0">
+                <a:solidFill>
+                  <a:srgbClr val="1F2A44"/>
+                </a:solidFill>
+                <a:latin typeface="Nunito Sans"/>
+              </a:rPr>
+              <a:t> de lo que consumen.</a:t>
             </a:r>
           </a:p>
           <a:p>
@@ -4265,7 +4622,7 @@
                 </a:solidFill>
                 <a:latin typeface="Nunito Sans"/>
               </a:rPr>
-              <a:t>Da una cifra sin decir de dónde sale. Antes de creerla, hay que buscarla en fuentes fiables.</a:t>
+              <a:t>Y aunque fuera verdad, que muchos lo hagan no dice si es bueno para mí.</a:t>
             </a:r>
           </a:p>
           <a:p>
@@ -4290,7 +4647,7 @@
                 </a:solidFill>
                 <a:latin typeface="Nunito Sans"/>
               </a:rPr>
-              <a:t>Conclusión: son señales de bulo. No se reenvía hasta comprobarlo.</a:t>
+              <a:t>Conclusión: «todo el mundo» no es una razón. Y, como en Asch, un solo aliado ayuda a resistir.</a:t>
             </a:r>
           </a:p>
         </p:txBody>
@@ -4309,7 +4666,7 @@
     <p:bg>
       <p:bgPr>
         <a:solidFill>
-          <a:srgbClr val="FBF7EF"/>
+          <a:srgbClr val="1F2A44"/>
         </a:solidFill>
         <a:effectLst/>
       </p:bgPr>
@@ -4329,8 +4686,8 @@
         </p:nvSpPr>
         <p:spPr>
           <a:xfrm>
-            <a:off x="640000" y="380000"/>
-            <a:ext cx="10912000" cy="420000"/>
+            <a:off x="640000" y="2300000"/>
+            <a:ext cx="10912000" cy="500000"/>
           </a:xfrm>
           <a:prstGeom prst="rect">
             <a:avLst/>
@@ -4345,17 +4702,17 @@
           <a:p>
             <a:pPr>
               <a:spcAft>
-                <a:spcPts val="630"/>
-              </a:spcAft>
-            </a:pPr>
-            <a:r>
-              <a:rPr sz="1400" b="1">
-                <a:solidFill>
-                  <a:srgbClr val="E8793A"/>
-                </a:solidFill>
-                <a:latin typeface="Nunito Sans"/>
-              </a:rPr>
-              <a:t>BLOQUE 2 · CASOS RESUELTOS</a:t>
+                <a:spcPts val="810"/>
+              </a:spcAft>
+            </a:pPr>
+            <a:r>
+              <a:rPr sz="1800" b="1">
+                <a:solidFill>
+                  <a:srgbClr val="F4B183"/>
+                </a:solidFill>
+                <a:latin typeface="Nunito Sans"/>
+              </a:rPr>
+              <a:t>BLOQUE 3</a:t>
             </a:r>
           </a:p>
         </p:txBody>
@@ -4368,7 +4725,7 @@
         </p:nvSpPr>
         <p:spPr>
           <a:xfrm>
-            <a:off x="640000" y="760000"/>
+            <a:off x="640000" y="2800000"/>
             <a:ext cx="10912000" cy="800000"/>
           </a:xfrm>
           <a:prstGeom prst="rect">
@@ -4384,222 +4741,17 @@
           <a:p>
             <a:pPr>
               <a:spcAft>
-                <a:spcPts val="1710"/>
-              </a:spcAft>
-            </a:pPr>
-            <a:r>
-              <a:rPr sz="3800" b="1">
-                <a:solidFill>
-                  <a:srgbClr val="1F2A44"/>
+                <a:spcPts val="2160"/>
+              </a:spcAft>
+            </a:pPr>
+            <a:r>
+              <a:rPr sz="4800" b="1">
+                <a:solidFill>
+                  <a:srgbClr val="FBF7EF"/>
                 </a:solidFill>
                 <a:latin typeface="Fredoka"/>
               </a:rPr>
-              <a:t>Caso 2 · «Lo que yo decía»</a:t>
-            </a:r>
-          </a:p>
-        </p:txBody>
-      </p:sp>
-      <p:sp>
-        <p:nvSpPr>
-          <p:cNvPr id="4" name="Rectangle 3"/>
-          <p:cNvSpPr/>
-          <p:nvPr/>
-        </p:nvSpPr>
-        <p:spPr>
-          <a:xfrm>
-            <a:off x="640000" y="1600000"/>
-            <a:ext cx="10912000" cy="1100000"/>
-          </a:xfrm>
-          <a:prstGeom prst="rect">
-            <a:avLst/>
-          </a:prstGeom>
-          <a:solidFill>
-            <a:srgbClr val="FFFFFF"/>
-          </a:solidFill>
-          <a:ln>
-            <a:noFill/>
-          </a:ln>
-        </p:spPr>
-        <p:style>
-          <a:lnRef idx="1">
-            <a:schemeClr val="accent1"/>
-          </a:lnRef>
-          <a:fillRef idx="3">
-            <a:schemeClr val="accent1"/>
-          </a:fillRef>
-          <a:effectRef idx="2">
-            <a:schemeClr val="accent1"/>
-          </a:effectRef>
-          <a:fontRef idx="minor">
-            <a:schemeClr val="lt1"/>
-          </a:fontRef>
-        </p:style>
-        <p:txBody>
-          <a:bodyPr rtlCol="0" anchor="ctr"/>
-          <a:lstStyle/>
-          <a:p>
-            <a:pPr algn="ctr"/>
-          </a:p>
-        </p:txBody>
-      </p:sp>
-      <p:sp>
-        <p:nvSpPr>
-          <p:cNvPr id="5" name="TextBox 4"/>
-          <p:cNvSpPr txBox="1"/>
-          <p:nvPr/>
-        </p:nvSpPr>
-        <p:spPr>
-          <a:xfrm>
-            <a:off x="840000" y="1650000"/>
-            <a:ext cx="10512000" cy="1000000"/>
-          </a:xfrm>
-          <a:prstGeom prst="rect">
-            <a:avLst/>
-          </a:prstGeom>
-          <a:noFill/>
-        </p:spPr>
-        <p:txBody>
-          <a:bodyPr wrap="square" anchor="ctr">
-            <a:spAutoFit/>
-          </a:bodyPr>
-          <a:lstStyle/>
-          <a:p>
-            <a:pPr>
-              <a:spcAft>
-                <a:spcPts val="1170"/>
-              </a:spcAft>
-            </a:pPr>
-            <a:r>
-              <a:rPr sz="2600" b="1">
-                <a:solidFill>
-                  <a:srgbClr val="1F2A44"/>
-                </a:solidFill>
-                <a:latin typeface="Nunito Sans"/>
-              </a:rPr>
-              <a:t>Frase inventada, de las que se oyen por ahí. Vamos a ver por qué falla. Un chico lee una noticia sobre un robo. El detenido nació en otro país. Ese chico comenta: «Lo que yo decía: los de fuera vienen a robar».</a:t>
-            </a:r>
-          </a:p>
-        </p:txBody>
-      </p:sp>
-      <p:sp>
-        <p:nvSpPr>
-          <p:cNvPr id="6" name="TextBox 5"/>
-          <p:cNvSpPr txBox="1"/>
-          <p:nvPr/>
-        </p:nvSpPr>
-        <p:spPr>
-          <a:xfrm>
-            <a:off x="640000" y="2900000"/>
-            <a:ext cx="10912000" cy="3500000"/>
-          </a:xfrm>
-          <a:prstGeom prst="rect">
-            <a:avLst/>
-          </a:prstGeom>
-          <a:noFill/>
-        </p:spPr>
-        <p:txBody>
-          <a:bodyPr wrap="square">
-            <a:spAutoFit/>
-          </a:bodyPr>
-          <a:lstStyle/>
-          <a:p>
-            <a:pPr>
-              <a:spcAft>
-                <a:spcPts val="1080"/>
-              </a:spcAft>
-            </a:pPr>
-            <a:r>
-              <a:rPr sz="2400" b="1">
-                <a:solidFill>
-                  <a:srgbClr val="E8793A"/>
-                </a:solidFill>
-                <a:latin typeface="Nunito Sans"/>
-              </a:rPr>
-              <a:t>1. </a:t>
-            </a:r>
-            <a:r>
-              <a:rPr sz="2400" b="0">
-                <a:solidFill>
-                  <a:srgbClr val="1F2A44"/>
-                </a:solidFill>
-                <a:latin typeface="Nunito Sans"/>
-              </a:rPr>
-              <a:t>De un caso saca una conclusión sobre todos: generalización apresurada (sesión 19).</a:t>
-            </a:r>
-          </a:p>
-          <a:p>
-            <a:pPr>
-              <a:spcAft>
-                <a:spcPts val="1080"/>
-              </a:spcAft>
-            </a:pPr>
-            <a:r>
-              <a:rPr sz="2400" b="1">
-                <a:solidFill>
-                  <a:srgbClr val="E8793A"/>
-                </a:solidFill>
-                <a:latin typeface="Nunito Sans"/>
-              </a:rPr>
-              <a:t>2. </a:t>
-            </a:r>
-            <a:r>
-              <a:rPr sz="2400" b="0">
-                <a:solidFill>
-                  <a:srgbClr val="1F2A44"/>
-                </a:solidFill>
-                <a:latin typeface="Nunito Sans"/>
-              </a:rPr>
-              <a:t>¿Cuántos casos ha mirado? Uno. En Bilbao viven muchísimas personas de fuera que trabajan y estudian.</a:t>
-            </a:r>
-          </a:p>
-          <a:p>
-            <a:pPr>
-              <a:spcAft>
-                <a:spcPts val="1080"/>
-              </a:spcAft>
-            </a:pPr>
-            <a:r>
-              <a:rPr sz="2400" b="1">
-                <a:solidFill>
-                  <a:srgbClr val="E8793A"/>
-                </a:solidFill>
-                <a:latin typeface="Nunito Sans"/>
-              </a:rPr>
-              <a:t>3. </a:t>
-            </a:r>
-            <a:r>
-              <a:rPr sz="2400" b="0">
-                <a:solidFill>
-                  <a:srgbClr val="1F2A44"/>
-                </a:solidFill>
-                <a:latin typeface="Nunito Sans"/>
-              </a:rPr>
-              <a:t>«Lo que yo decía»: se fija en lo que confirma su idea (sesión 44).</a:t>
-            </a:r>
-          </a:p>
-          <a:p>
-            <a:pPr>
-              <a:spcAft>
-                <a:spcPts val="1080"/>
-              </a:spcAft>
-            </a:pPr>
-            <a:r>
-              <a:rPr sz="2400" b="1">
-                <a:solidFill>
-                  <a:srgbClr val="E8793A"/>
-                </a:solidFill>
-                <a:latin typeface="Nunito Sans"/>
-              </a:rPr>
-              <a:t>4. </a:t>
-            </a:r>
-            <a:r>
-              <a:rPr sz="2400" b="0">
-                <a:solidFill>
-                  <a:srgbClr val="1F2A44"/>
-                </a:solidFill>
-                <a:latin typeface="Nunito Sans"/>
-              </a:rPr>
-              <a:t>Conclusión: un caso no dice nada de todo un grupo. Cada persona responde de lo que hace.</a:t>
+              <a:t>Mucho tiempo no es adicción</a:t>
             </a:r>
           </a:p>
         </p:txBody>
@@ -4664,7 +4816,7 @@
                 </a:solidFill>
                 <a:latin typeface="Nunito Sans"/>
               </a:rPr>
-              <a:t>CASO TRAMPA · BLOQUE 2 · CASOS RESUELTOS</a:t>
+              <a:t>CASO TRAMPA · BLOQUE 3 · MUCHO TIEMPO NO ES ADICCIÓN</a:t>
             </a:r>
           </a:p>
         </p:txBody>
@@ -4703,7 +4855,7 @@
                 </a:solidFill>
                 <a:latin typeface="Fredoka"/>
               </a:rPr>
-              <a:t>⚠ Una generalización amable</a:t>
+              <a:t>⚠ ¿Adicto al Fortnite?</a:t>
             </a:r>
           </a:p>
         </p:txBody>
@@ -4785,7 +4937,7 @@
                 </a:solidFill>
                 <a:latin typeface="Nunito Sans"/>
               </a:rPr>
-              <a:t>Una chica, harta de los comentarios contra los migrantes, escribe en un chat: «Pues los inmigrantes son todos buenísimos y muy trabajadores».</a:t>
+              <a:t>Un chico juega tres horas al Fortnite los sábados con sus primos. Duerme bien, estudia y queda con la cuadrilla. Su tía dice: «Es adicto». (Ejemplo inventado.)</a:t>
             </a:r>
           </a:p>
         </p:txBody>
@@ -4833,7 +4985,7 @@
                 </a:solidFill>
                 <a:latin typeface="Nunito Sans"/>
               </a:rPr>
-              <a:t>Esa chica defiende a los migrantes. ¿Está razonando bien?</a:t>
+              <a:t>Tres horas es mucho. ¿Tiene razón la tía?</a:t>
             </a:r>
           </a:p>
           <a:p>
@@ -4858,7 +5010,7 @@
                 </a:solidFill>
                 <a:latin typeface="Nunito Sans"/>
               </a:rPr>
-              <a:t>Parece que sí: su intención es buena y no ataca a nadie.</a:t>
+              <a:t>Parece que sí: tres horas seguidas es bastante tiempo.</a:t>
             </a:r>
           </a:p>
           <a:p>
@@ -4883,7 +5035,25 @@
                 </a:solidFill>
                 <a:latin typeface="Nunito Sans"/>
               </a:rPr>
-              <a:t>Pero dice «todos»: habla de millones de personas distintas como si fueran una sola.</a:t>
+              <a:t>Pero la adicción no se mide solo en horas. Se mira si hay </a:t>
+            </a:r>
+            <a:r>
+              <a:rPr sz="2400" b="1">
+                <a:solidFill>
+                  <a:srgbClr val="1F2A44"/>
+                </a:solidFill>
+                <a:latin typeface="Nunito Sans"/>
+              </a:rPr>
+              <a:t>pérdida de control</a:t>
+            </a:r>
+            <a:r>
+              <a:rPr sz="2400" b="0">
+                <a:solidFill>
+                  <a:srgbClr val="1F2A44"/>
+                </a:solidFill>
+                <a:latin typeface="Nunito Sans"/>
+              </a:rPr>
+              <a:t> y daño.</a:t>
             </a:r>
           </a:p>
           <a:p>
@@ -4908,7 +5078,7 @@
                 </a:solidFill>
                 <a:latin typeface="Nunito Sans"/>
               </a:rPr>
-              <a:t>Es otra generalización apresurada, aunque sea positiva (sesión 19).</a:t>
+              <a:t>Ese chico elige cuándo jugar y no deja de lado el sueño, los estudios ni a la cuadrilla.</a:t>
             </a:r>
           </a:p>
           <a:p>
@@ -4933,7 +5103,7 @@
                 </a:solidFill>
                 <a:latin typeface="Nunito Sans"/>
               </a:rPr>
-              <a:t>Conclusión: los migrantes son personas variadas, como todas. Ni «todos malos» ni «todos buenos».</a:t>
+              <a:t>Conclusión: mucho tiempo no es lo mismo que adicción. Antes de poner la etiqueta, mira las señales.</a:t>
             </a:r>
           </a:p>
         </p:txBody>
@@ -4998,7 +5168,7 @@
                 </a:solidFill>
                 <a:latin typeface="Nunito Sans"/>
               </a:rPr>
-              <a:t>LO DE HOY EN TRES LÍNEAS</a:t>
+              <a:t>BLOQUE 3 · MUCHO TIEMPO NO ES ADICCIÓN</a:t>
             </a:r>
           </a:p>
         </p:txBody>
@@ -5037,7 +5207,7 @@
                 </a:solidFill>
                 <a:latin typeface="Fredoka"/>
               </a:rPr>
-              <a:t>Escríbelo tú primero, sin mirar</a:t>
+              <a:t>Ocio saludable</a:t>
             </a:r>
           </a:p>
         </p:txBody>
@@ -5050,8 +5220,8 @@
         </p:nvSpPr>
         <p:spPr>
           <a:xfrm>
-            <a:off x="640000" y="1800000"/>
-            <a:ext cx="10912000" cy="1500000"/>
+            <a:off x="840000" y="1730000"/>
+            <a:ext cx="10512000" cy="1000000"/>
           </a:xfrm>
           <a:prstGeom prst="rect">
             <a:avLst/>
@@ -5059,6 +5229,45 @@
           <a:noFill/>
         </p:spPr>
         <p:txBody>
+          <a:bodyPr wrap="square" anchor="ctr">
+            <a:spAutoFit/>
+          </a:bodyPr>
+          <a:lstStyle/>
+          <a:p>
+            <a:pPr>
+              <a:spcAft>
+                <a:spcPts val="1080"/>
+              </a:spcAft>
+            </a:pPr>
+            <a:r>
+              <a:rPr sz="2400" b="0">
+                <a:solidFill>
+                  <a:srgbClr val="1F2A44"/>
+                </a:solidFill>
+                <a:latin typeface="Nunito Sans"/>
+              </a:rPr>
+              <a:t>Una forma de verlo: el ocio saludable es el que…</a:t>
+            </a:r>
+          </a:p>
+        </p:txBody>
+      </p:sp>
+      <p:sp>
+        <p:nvSpPr>
+          <p:cNvPr id="5" name="TextBox 4"/>
+          <p:cNvSpPr txBox="1"/>
+          <p:nvPr/>
+        </p:nvSpPr>
+        <p:spPr>
+          <a:xfrm>
+            <a:off x="640000" y="3000000"/>
+            <a:ext cx="10912000" cy="3458000"/>
+          </a:xfrm>
+          <a:prstGeom prst="rect">
+            <a:avLst/>
+          </a:prstGeom>
+          <a:noFill/>
+        </p:spPr>
+        <p:txBody>
           <a:bodyPr wrap="square">
             <a:spAutoFit/>
           </a:bodyPr>
@@ -5066,17 +5275,128 @@
           <a:p>
             <a:pPr>
               <a:spcAft>
-                <a:spcPts val="1170"/>
-              </a:spcAft>
-            </a:pPr>
-            <a:r>
-              <a:rPr sz="2600" b="0">
-                <a:solidFill>
-                  <a:srgbClr val="4A5568"/>
-                </a:solidFill>
-                <a:latin typeface="Nunito Sans"/>
-              </a:rPr>
-              <a:t>Dos minutos. Después lo comparamos.</a:t>
+                <a:spcPts val="1260"/>
+              </a:spcAft>
+            </a:pPr>
+            <a:r>
+              <a:rPr sz="2800" b="1">
+                <a:solidFill>
+                  <a:srgbClr val="E8793A"/>
+                </a:solidFill>
+                <a:latin typeface="Nunito Sans"/>
+              </a:rPr>
+              <a:t>• </a:t>
+            </a:r>
+            <a:r>
+              <a:rPr sz="2800" b="0">
+                <a:solidFill>
+                  <a:srgbClr val="1F2A44"/>
+                </a:solidFill>
+                <a:latin typeface="Nunito Sans"/>
+              </a:rPr>
+              <a:t>Eliges tú, no el grupo ni la app (sesión 52)</a:t>
+            </a:r>
+          </a:p>
+          <a:p>
+            <a:pPr>
+              <a:spcAft>
+                <a:spcPts val="1260"/>
+              </a:spcAft>
+            </a:pPr>
+            <a:r>
+              <a:rPr sz="2800" b="1">
+                <a:solidFill>
+                  <a:srgbClr val="E8793A"/>
+                </a:solidFill>
+                <a:latin typeface="Nunito Sans"/>
+              </a:rPr>
+              <a:t>• </a:t>
+            </a:r>
+            <a:r>
+              <a:rPr sz="2800" b="0">
+                <a:solidFill>
+                  <a:srgbClr val="1F2A44"/>
+                </a:solidFill>
+                <a:latin typeface="Nunito Sans"/>
+              </a:rPr>
+              <a:t>Es </a:t>
+            </a:r>
+            <a:r>
+              <a:rPr sz="2800" b="1">
+                <a:solidFill>
+                  <a:srgbClr val="1F2A44"/>
+                </a:solidFill>
+                <a:latin typeface="Nunito Sans"/>
+              </a:rPr>
+              <a:t>variado</a:t>
+            </a:r>
+            <a:r>
+              <a:rPr sz="2800" b="0">
+                <a:solidFill>
+                  <a:srgbClr val="1F2A44"/>
+                </a:solidFill>
+                <a:latin typeface="Nunito Sans"/>
+              </a:rPr>
+              <a:t>: deporte, música, monte, leer, quedar con la cuadrilla</a:t>
+            </a:r>
+          </a:p>
+          <a:p>
+            <a:pPr>
+              <a:spcAft>
+                <a:spcPts val="1260"/>
+              </a:spcAft>
+            </a:pPr>
+            <a:r>
+              <a:rPr sz="2800" b="1">
+                <a:solidFill>
+                  <a:srgbClr val="E8793A"/>
+                </a:solidFill>
+                <a:latin typeface="Nunito Sans"/>
+              </a:rPr>
+              <a:t>• </a:t>
+            </a:r>
+            <a:r>
+              <a:rPr sz="2800" b="0">
+                <a:solidFill>
+                  <a:srgbClr val="1F2A44"/>
+                </a:solidFill>
+                <a:latin typeface="Nunito Sans"/>
+              </a:rPr>
+              <a:t>No te quita el sueño, los estudios ni la salud</a:t>
+            </a:r>
+          </a:p>
+          <a:p>
+            <a:pPr>
+              <a:spcAft>
+                <a:spcPts val="1260"/>
+              </a:spcAft>
+            </a:pPr>
+            <a:r>
+              <a:rPr sz="2800" b="1">
+                <a:solidFill>
+                  <a:srgbClr val="E8793A"/>
+                </a:solidFill>
+                <a:latin typeface="Nunito Sans"/>
+              </a:rPr>
+              <a:t>• </a:t>
+            </a:r>
+            <a:r>
+              <a:rPr sz="2800" b="0">
+                <a:solidFill>
+                  <a:srgbClr val="1F2A44"/>
+                </a:solidFill>
+                <a:latin typeface="Nunito Sans"/>
+              </a:rPr>
+              <a:t>Puedes dejarlo cuando quieres: sigues teniendo el </a:t>
+            </a:r>
+            <a:r>
+              <a:rPr sz="2800" b="1">
+                <a:solidFill>
+                  <a:srgbClr val="1F2A44"/>
+                </a:solidFill>
+                <a:latin typeface="Nunito Sans"/>
+              </a:rPr>
+              <a:t>control</a:t>
             </a:r>
           </a:p>
         </p:txBody>
@@ -5154,8 +5474,8 @@
         </p:nvSpPr>
         <p:spPr>
           <a:xfrm>
-            <a:off x="640000" y="1300000"/>
-            <a:ext cx="10912000" cy="4800000"/>
+            <a:off x="640000" y="760000"/>
+            <a:ext cx="10912000" cy="800000"/>
           </a:xfrm>
           <a:prstGeom prst="rect">
             <a:avLst/>
@@ -5170,76 +5490,56 @@
           <a:p>
             <a:pPr>
               <a:spcAft>
-                <a:spcPts val="1350"/>
-              </a:spcAft>
-            </a:pPr>
-            <a:r>
-              <a:rPr sz="3000" b="1">
-                <a:solidFill>
-                  <a:srgbClr val="E8793A"/>
-                </a:solidFill>
-                <a:latin typeface="Nunito Sans"/>
-              </a:rPr>
-              <a:t>1. </a:t>
-            </a:r>
-            <a:r>
-              <a:rPr sz="3000" b="0">
+                <a:spcPts val="1710"/>
+              </a:spcAft>
+            </a:pPr>
+            <a:r>
+              <a:rPr sz="3800" b="1">
                 <a:solidFill>
                   <a:srgbClr val="1F2A44"/>
                 </a:solidFill>
-                <a:latin typeface="Nunito Sans"/>
-              </a:rPr>
-              <a:t>La globalización conecta el mundo; lo glocal es lo global vivido a nuestra manera.</a:t>
-            </a:r>
-          </a:p>
-          <a:p>
-            <a:pPr>
-              <a:spcAft>
-                <a:spcPts val="1350"/>
-              </a:spcAft>
-            </a:pPr>
-            <a:r>
-              <a:rPr sz="3000" b="1">
-                <a:solidFill>
-                  <a:srgbClr val="E8793A"/>
-                </a:solidFill>
-                <a:latin typeface="Nunito Sans"/>
-              </a:rPr>
-              <a:t>2. </a:t>
-            </a:r>
-            <a:r>
-              <a:rPr sz="3000" b="0">
-                <a:solidFill>
-                  <a:srgbClr val="1F2A44"/>
-                </a:solidFill>
-                <a:latin typeface="Nunito Sans"/>
-              </a:rPr>
-              <a:t>Se emigra por trabajo, guerra, clima o familia, y los humanos siempre hemos migrado.</a:t>
-            </a:r>
-          </a:p>
-          <a:p>
-            <a:pPr>
-              <a:spcAft>
-                <a:spcPts val="1350"/>
-              </a:spcAft>
-            </a:pPr>
-            <a:r>
-              <a:rPr sz="3000" b="1">
-                <a:solidFill>
-                  <a:srgbClr val="E8793A"/>
-                </a:solidFill>
-                <a:latin typeface="Nunito Sans"/>
-              </a:rPr>
-              <a:t>3. </a:t>
-            </a:r>
-            <a:r>
-              <a:rPr sz="3000" b="0">
-                <a:solidFill>
-                  <a:srgbClr val="1F2A44"/>
-                </a:solidFill>
-                <a:latin typeface="Nunito Sans"/>
-              </a:rPr>
-              <a:t>Sobre los migrantes circulan bulos y generalizaciones: comprueba la fuente y cuenta los casos.</a:t>
+                <a:latin typeface="Fredoka"/>
+              </a:rPr>
+              <a:t>Escríbelo tú primero, sin mirar</a:t>
+            </a:r>
+          </a:p>
+        </p:txBody>
+      </p:sp>
+      <p:sp>
+        <p:nvSpPr>
+          <p:cNvPr id="4" name="TextBox 3"/>
+          <p:cNvSpPr txBox="1"/>
+          <p:nvPr/>
+        </p:nvSpPr>
+        <p:spPr>
+          <a:xfrm>
+            <a:off x="640000" y="1800000"/>
+            <a:ext cx="10912000" cy="1500000"/>
+          </a:xfrm>
+          <a:prstGeom prst="rect">
+            <a:avLst/>
+          </a:prstGeom>
+          <a:noFill/>
+        </p:spPr>
+        <p:txBody>
+          <a:bodyPr wrap="square">
+            <a:spAutoFit/>
+          </a:bodyPr>
+          <a:lstStyle/>
+          <a:p>
+            <a:pPr>
+              <a:spcAft>
+                <a:spcPts val="1170"/>
+              </a:spcAft>
+            </a:pPr>
+            <a:r>
+              <a:rPr sz="2600" b="0">
+                <a:solidFill>
+                  <a:srgbClr val="4A5568"/>
+                </a:solidFill>
+                <a:latin typeface="Nunito Sans"/>
+              </a:rPr>
+              <a:t>Dos minutos. Después lo comparamos.</a:t>
             </a:r>
           </a:p>
         </p:txBody>
@@ -5258,7 +5558,7 @@
     <p:bg>
       <p:bgPr>
         <a:solidFill>
-          <a:srgbClr val="1F2A44"/>
+          <a:srgbClr val="FBF7EF"/>
         </a:solidFill>
         <a:effectLst/>
       </p:bgPr>
@@ -5300,11 +5600,11 @@
             <a:r>
               <a:rPr sz="1400" b="1">
                 <a:solidFill>
-                  <a:srgbClr val="F4B183"/>
-                </a:solidFill>
-                <a:latin typeface="Nunito Sans"/>
-              </a:rPr>
-              <a:t>VÍDEO</a:t>
+                  <a:srgbClr val="E8793A"/>
+                </a:solidFill>
+                <a:latin typeface="Nunito Sans"/>
+              </a:rPr>
+              <a:t>LO DE HOY EN TRES LÍNEAS</a:t>
             </a:r>
           </a:p>
         </p:txBody>
@@ -5317,8 +5617,8 @@
         </p:nvSpPr>
         <p:spPr>
           <a:xfrm>
-            <a:off x="640000" y="760000"/>
-            <a:ext cx="10912000" cy="800000"/>
+            <a:off x="640000" y="1300000"/>
+            <a:ext cx="10912000" cy="4800000"/>
           </a:xfrm>
           <a:prstGeom prst="rect">
             <a:avLst/>
@@ -5333,56 +5633,76 @@
           <a:p>
             <a:pPr>
               <a:spcAft>
-                <a:spcPts val="1620"/>
-              </a:spcAft>
-            </a:pPr>
-            <a:r>
-              <a:rPr sz="3600" b="1">
-                <a:solidFill>
-                  <a:srgbClr val="FBF7EF"/>
-                </a:solidFill>
-                <a:latin typeface="Fredoka"/>
-              </a:rPr>
-              <a:t>La emigración vasca a América en los siglos XIX y XX</a:t>
-            </a:r>
-          </a:p>
-        </p:txBody>
-      </p:sp>
-      <p:sp>
-        <p:nvSpPr>
-          <p:cNvPr id="4" name="TextBox 3"/>
-          <p:cNvSpPr txBox="1"/>
-          <p:nvPr/>
-        </p:nvSpPr>
-        <p:spPr>
-          <a:xfrm>
-            <a:off x="640000" y="2200000"/>
-            <a:ext cx="10912000" cy="2000000"/>
-          </a:xfrm>
-          <a:prstGeom prst="rect">
-            <a:avLst/>
-          </a:prstGeom>
-          <a:noFill/>
-        </p:spPr>
-        <p:txBody>
-          <a:bodyPr wrap="square">
-            <a:spAutoFit/>
-          </a:bodyPr>
-          <a:lstStyle/>
-          <a:p>
-            <a:pPr>
-              <a:spcAft>
-                <a:spcPts val="1080"/>
-              </a:spcAft>
-            </a:pPr>
-            <a:r>
-              <a:rPr sz="2400" b="0">
-                <a:solidFill>
-                  <a:srgbClr val="C9D3E6"/>
-                </a:solidFill>
-                <a:latin typeface="Nunito Sans"/>
-              </a:rPr>
-              <a:t>Que vean que migrar también forma parte de la historia de Euskadi.</a:t>
+                <a:spcPts val="1350"/>
+              </a:spcAft>
+            </a:pPr>
+            <a:r>
+              <a:rPr sz="3000" b="1">
+                <a:solidFill>
+                  <a:srgbClr val="E8793A"/>
+                </a:solidFill>
+                <a:latin typeface="Nunito Sans"/>
+              </a:rPr>
+              <a:t>1. </a:t>
+            </a:r>
+            <a:r>
+              <a:rPr sz="3000" b="0">
+                <a:solidFill>
+                  <a:srgbClr val="1F2A44"/>
+                </a:solidFill>
+                <a:latin typeface="Nunito Sans"/>
+              </a:rPr>
+              <a:t>El ocio es tiempo libre que eliges tú para descansar, divertirte o aprender.</a:t>
+            </a:r>
+          </a:p>
+          <a:p>
+            <a:pPr>
+              <a:spcAft>
+                <a:spcPts val="1350"/>
+              </a:spcAft>
+            </a:pPr>
+            <a:r>
+              <a:rPr sz="3000" b="1">
+                <a:solidFill>
+                  <a:srgbClr val="E8793A"/>
+                </a:solidFill>
+                <a:latin typeface="Nunito Sans"/>
+              </a:rPr>
+              <a:t>2. </a:t>
+            </a:r>
+            <a:r>
+              <a:rPr sz="3000" b="0">
+                <a:solidFill>
+                  <a:srgbClr val="1F2A44"/>
+                </a:solidFill>
+                <a:latin typeface="Nunito Sans"/>
+              </a:rPr>
+              <a:t>Adicción es perder el control: sigues aunque haga daño. Puede ser con o sin sustancia.</a:t>
+            </a:r>
+          </a:p>
+          <a:p>
+            <a:pPr>
+              <a:spcAft>
+                <a:spcPts val="1350"/>
+              </a:spcAft>
+            </a:pPr>
+            <a:r>
+              <a:rPr sz="3000" b="1">
+                <a:solidFill>
+                  <a:srgbClr val="E8793A"/>
+                </a:solidFill>
+                <a:latin typeface="Nunito Sans"/>
+              </a:rPr>
+              <a:t>3. </a:t>
+            </a:r>
+            <a:r>
+              <a:rPr sz="3000" b="0">
+                <a:solidFill>
+                  <a:srgbClr val="1F2A44"/>
+                </a:solidFill>
+                <a:latin typeface="Nunito Sans"/>
+              </a:rPr>
+              <a:t>Ante un mito sobre drogas: ¿quién lo dice, cómo lo sabe y qué dicen las fuentes sanitarias?</a:t>
             </a:r>
           </a:p>
         </p:txBody>
@@ -5447,6 +5767,149 @@
                 </a:solidFill>
                 <a:latin typeface="Nunito Sans"/>
               </a:rPr>
+              <a:t>VÍDEO</a:t>
+            </a:r>
+          </a:p>
+        </p:txBody>
+      </p:sp>
+      <p:sp>
+        <p:nvSpPr>
+          <p:cNvPr id="3" name="TextBox 2"/>
+          <p:cNvSpPr txBox="1"/>
+          <p:nvPr/>
+        </p:nvSpPr>
+        <p:spPr>
+          <a:xfrm>
+            <a:off x="640000" y="760000"/>
+            <a:ext cx="10912000" cy="800000"/>
+          </a:xfrm>
+          <a:prstGeom prst="rect">
+            <a:avLst/>
+          </a:prstGeom>
+          <a:noFill/>
+        </p:spPr>
+        <p:txBody>
+          <a:bodyPr wrap="square">
+            <a:spAutoFit/>
+          </a:bodyPr>
+          <a:lstStyle/>
+          <a:p>
+            <a:pPr>
+              <a:spcAft>
+                <a:spcPts val="1620"/>
+              </a:spcAft>
+            </a:pPr>
+            <a:r>
+              <a:rPr sz="3600" b="1">
+                <a:solidFill>
+                  <a:srgbClr val="FBF7EF"/>
+                </a:solidFill>
+                <a:latin typeface="Fredoka"/>
+              </a:rPr>
+              <a:t>Qué es una adicción y qué dicen las fuentes sanitarias sobre el vapeo y el cannabis</a:t>
+            </a:r>
+          </a:p>
+        </p:txBody>
+      </p:sp>
+      <p:sp>
+        <p:nvSpPr>
+          <p:cNvPr id="4" name="TextBox 3"/>
+          <p:cNvSpPr txBox="1"/>
+          <p:nvPr/>
+        </p:nvSpPr>
+        <p:spPr>
+          <a:xfrm>
+            <a:off x="640000" y="2200000"/>
+            <a:ext cx="10912000" cy="2000000"/>
+          </a:xfrm>
+          <a:prstGeom prst="rect">
+            <a:avLst/>
+          </a:prstGeom>
+          <a:noFill/>
+        </p:spPr>
+        <p:txBody>
+          <a:bodyPr wrap="square">
+            <a:spAutoFit/>
+          </a:bodyPr>
+          <a:lstStyle/>
+          <a:p>
+            <a:pPr>
+              <a:spcAft>
+                <a:spcPts val="1080"/>
+              </a:spcAft>
+            </a:pPr>
+            <a:r>
+              <a:rPr sz="2400" b="0">
+                <a:solidFill>
+                  <a:srgbClr val="C9D3E6"/>
+                </a:solidFill>
+                <a:latin typeface="Nunito Sans"/>
+              </a:rPr>
+              <a:t>Contrastar los mitos con una fuente sanitaria fiable y repasar las señales de una adicción.</a:t>
+            </a:r>
+          </a:p>
+        </p:txBody>
+      </p:sp>
+    </p:spTree>
+  </p:cSld>
+  <p:clrMapOvr>
+    <a:masterClrMapping/>
+  </p:clrMapOvr>
+</p:sld>
+</file>
+
+<file path=ppt/slides/slide19.xml><?xml version="1.0" encoding="utf-8"?>
+<p:sld xmlns:a="http://schemas.openxmlformats.org/drawingml/2006/main" xmlns:p="http://schemas.openxmlformats.org/presentationml/2006/main" xmlns:r="http://schemas.openxmlformats.org/officeDocument/2006/relationships">
+  <p:cSld>
+    <p:bg>
+      <p:bgPr>
+        <a:solidFill>
+          <a:srgbClr val="1F2A44"/>
+        </a:solidFill>
+        <a:effectLst/>
+      </p:bgPr>
+    </p:bg>
+    <p:spTree>
+      <p:nvGrpSpPr>
+        <p:cNvPr id="1" name=""/>
+        <p:cNvGrpSpPr/>
+        <p:nvPr/>
+      </p:nvGrpSpPr>
+      <p:grpSpPr/>
+      <p:sp>
+        <p:nvSpPr>
+          <p:cNvPr id="2" name="TextBox 1"/>
+          <p:cNvSpPr txBox="1"/>
+          <p:nvPr/>
+        </p:nvSpPr>
+        <p:spPr>
+          <a:xfrm>
+            <a:off x="640000" y="380000"/>
+            <a:ext cx="10912000" cy="420000"/>
+          </a:xfrm>
+          <a:prstGeom prst="rect">
+            <a:avLst/>
+          </a:prstGeom>
+          <a:noFill/>
+        </p:spPr>
+        <p:txBody>
+          <a:bodyPr wrap="square">
+            <a:spAutoFit/>
+          </a:bodyPr>
+          <a:lstStyle/>
+          <a:p>
+            <a:pPr>
+              <a:spcAft>
+                <a:spcPts val="630"/>
+              </a:spcAft>
+            </a:pPr>
+            <a:r>
+              <a:rPr sz="1400" b="1">
+                <a:solidFill>
+                  <a:srgbClr val="F4B183"/>
+                </a:solidFill>
+                <a:latin typeface="Nunito Sans"/>
+              </a:rPr>
               <a:t>AHORA, LA HOJA DEL DÍA</a:t>
             </a:r>
           </a:p>
@@ -6040,7 +6503,7 @@
                 </a:solidFill>
                 <a:latin typeface="Nunito Sans"/>
               </a:rPr>
-              <a:t>La cultura se ______: no viene en los genes.  (sesión 84)</a:t>
+              <a:t>Según Georg Simmel, la moda junta dos ganas: parecerse a los demás y ______.  (sesión 84)</a:t>
             </a:r>
           </a:p>
           <a:p>
@@ -6065,7 +6528,7 @@
                 </a:solidFill>
                 <a:latin typeface="Nunito Sans"/>
               </a:rPr>
-              <a:t>El relativismo ______ dice que cada costumbre se entiende dentro de su cultura.  (sesión 84)</a:t>
+              <a:t>La ropa es una ______ de identidad, no la persona entera.  (sesión 84)</a:t>
             </a:r>
           </a:p>
           <a:p>
@@ -6242,7 +6705,7 @@
                 </a:solidFill>
                 <a:latin typeface="Nunito Sans"/>
               </a:rPr>
-              <a:t>La cultura se </a:t>
+              <a:t>Según Georg Simmel, la moda junta dos ganas: parecerse a los demás y </a:t>
             </a:r>
             <a:r>
               <a:rPr sz="2600" b="1">
@@ -6251,7 +6714,7 @@
                 </a:solidFill>
                 <a:latin typeface="Nunito Sans"/>
               </a:rPr>
-              <a:t>aprende</a:t>
+              <a:t>distinguirse</a:t>
             </a:r>
             <a:r>
               <a:rPr sz="2600" b="0">
@@ -6260,7 +6723,7 @@
                 </a:solidFill>
                 <a:latin typeface="Nunito Sans"/>
               </a:rPr>
-              <a:t>: no viene en los genes.  (sesión 84)</a:t>
+              <a:t>.  (sesión 84)</a:t>
             </a:r>
           </a:p>
           <a:p>
@@ -6285,7 +6748,7 @@
                 </a:solidFill>
                 <a:latin typeface="Nunito Sans"/>
               </a:rPr>
-              <a:t>El relativismo </a:t>
+              <a:t>La ropa es una </a:t>
             </a:r>
             <a:r>
               <a:rPr sz="2600" b="1">
@@ -6294,7 +6757,7 @@
                 </a:solidFill>
                 <a:latin typeface="Nunito Sans"/>
               </a:rPr>
-              <a:t>cultural</a:t>
+              <a:t>señal</a:t>
             </a:r>
             <a:r>
               <a:rPr sz="2600" b="0">
@@ -6303,7 +6766,7 @@
                 </a:solidFill>
                 <a:latin typeface="Nunito Sans"/>
               </a:rPr>
-              <a:t> dice que cada costumbre se entiende dentro de su cultura.  (sesión 84)</a:t>
+              <a:t> de identidad, no la persona entera.  (sesión 84)</a:t>
             </a:r>
           </a:p>
           <a:p>
@@ -6493,7 +6956,7 @@
                 </a:solidFill>
                 <a:latin typeface="Nunito Sans"/>
               </a:rPr>
-              <a:t>Tu móvil se diseñó en un país, se montó en otro y lleva minerales de otros más. Tu camiseta, igual. Y los usas en Bilbao.</a:t>
+              <a:t>Un vídeo con muchas visitas: «Vapear no es fumar. Es solo vapor de agua con sabor a fresa». (Ejemplo inventado.)</a:t>
             </a:r>
           </a:p>
         </p:txBody>
@@ -6532,7 +6995,7 @@
                 </a:solidFill>
                 <a:latin typeface="Nunito Sans"/>
               </a:rPr>
-              <a:t>¿Cuántos países caben en lo que llevas encima hoy?</a:t>
+              <a:t>¿Cómo podrías saber si es verdad?</a:t>
             </a:r>
           </a:p>
         </p:txBody>
@@ -6636,7 +7099,7 @@
                 </a:solidFill>
                 <a:latin typeface="Fredoka"/>
               </a:rPr>
-              <a:t>Un mundo conectado</a:t>
+              <a:t>Ocio y adicción</a:t>
             </a:r>
           </a:p>
         </p:txBody>
@@ -6701,7 +7164,7 @@
                 </a:solidFill>
                 <a:latin typeface="Nunito Sans"/>
               </a:rPr>
-              <a:t>BLOQUE 1 · UN MUNDO CONECTADO</a:t>
+              <a:t>BLOQUE 1 · OCIO Y ADICCIÓN</a:t>
             </a:r>
           </a:p>
         </p:txBody>
@@ -6740,7 +7203,7 @@
                 </a:solidFill>
                 <a:latin typeface="Fredoka"/>
               </a:rPr>
-              <a:t>Globalización</a:t>
+              <a:t>Ocio</a:t>
             </a:r>
           </a:p>
         </p:txBody>
@@ -6822,7 +7285,7 @@
                 </a:solidFill>
                 <a:latin typeface="Nunito Sans"/>
               </a:rPr>
-              <a:t>Es que los países están cada vez más conectados: productos, dinero, personas, noticias e ideas viajan por todo el mundo.</a:t>
+              <a:t>Es el tiempo libre que usas en lo que tú eliges, para descansar, divertirte o aprender algo.</a:t>
             </a:r>
           </a:p>
         </p:txBody>
@@ -6864,13 +7327,47 @@
               <a:t>• </a:t>
             </a:r>
             <a:r>
+              <a:rPr sz="2800" b="0">
+                <a:solidFill>
+                  <a:srgbClr val="1F2A44"/>
+                </a:solidFill>
+                <a:latin typeface="Nunito Sans"/>
+              </a:rPr>
+              <a:t>Una forma de verlo: tiene tres </a:t>
+            </a:r>
+            <a:r>
               <a:rPr sz="2800" b="1">
                 <a:solidFill>
                   <a:srgbClr val="1F2A44"/>
                 </a:solidFill>
                 <a:latin typeface="Nunito Sans"/>
               </a:rPr>
-              <a:t>Económica:</a:t>
+              <a:t>elementos</a:t>
+            </a:r>
+          </a:p>
+          <a:p>
+            <a:pPr>
+              <a:spcAft>
+                <a:spcPts val="1260"/>
+              </a:spcAft>
+            </a:pPr>
+            <a:r>
+              <a:rPr sz="2800" b="1">
+                <a:solidFill>
+                  <a:srgbClr val="E8793A"/>
+                </a:solidFill>
+                <a:latin typeface="Nunito Sans"/>
+              </a:rPr>
+              <a:t>• </a:t>
+            </a:r>
+            <a:r>
+              <a:rPr sz="2800" b="1">
+                <a:solidFill>
+                  <a:srgbClr val="1F2A44"/>
+                </a:solidFill>
+                <a:latin typeface="Nunito Sans"/>
+              </a:rPr>
+              <a:t>Tiempo libre:</a:t>
             </a:r>
             <a:r>
               <a:rPr sz="2800" b="0">
@@ -6879,7 +7376,7 @@
                 </a:solidFill>
                 <a:latin typeface="Nunito Sans"/>
               </a:rPr>
-              <a:t> empresas y productos de todas partes</a:t>
+              <a:t> fuera de clase, deberes y tareas</a:t>
             </a:r>
           </a:p>
           <a:p>
@@ -6904,7 +7401,7 @@
                 </a:solidFill>
                 <a:latin typeface="Nunito Sans"/>
               </a:rPr>
-              <a:t>Cultural:</a:t>
+              <a:t>Elección:</a:t>
             </a:r>
             <a:r>
               <a:rPr sz="2800" b="0">
@@ -6913,7 +7410,7 @@
                 </a:solidFill>
                 <a:latin typeface="Nunito Sans"/>
               </a:rPr>
-              <a:t> series, música, comida y redes de todo el mundo</a:t>
+              <a:t> lo decides tú, nadie te obliga</a:t>
             </a:r>
           </a:p>
           <a:p>
@@ -6932,31 +7429,22 @@
               <a:t>• </a:t>
             </a:r>
             <a:r>
+              <a:rPr sz="2800" b="1">
+                <a:solidFill>
+                  <a:srgbClr val="1F2A44"/>
+                </a:solidFill>
+                <a:latin typeface="Nunito Sans"/>
+              </a:rPr>
+              <a:t>Disfrute:</a:t>
+            </a:r>
+            <a:r>
               <a:rPr sz="2800" b="0">
                 <a:solidFill>
                   <a:srgbClr val="1F2A44"/>
                 </a:solidFill>
                 <a:latin typeface="Nunito Sans"/>
               </a:rPr>
-              <a:t>La hacen posible </a:t>
-            </a:r>
-            <a:r>
-              <a:rPr sz="2800" b="1">
-                <a:solidFill>
-                  <a:srgbClr val="1F2A44"/>
-                </a:solidFill>
-                <a:latin typeface="Nunito Sans"/>
-              </a:rPr>
-              <a:t>internet</a:t>
-            </a:r>
-            <a:r>
-              <a:rPr sz="2800" b="0">
-                <a:solidFill>
-                  <a:srgbClr val="1F2A44"/>
-                </a:solidFill>
-                <a:latin typeface="Nunito Sans"/>
-              </a:rPr>
-              <a:t> y el transporte barato</a:t>
+              <a:t> te sienta bien, te divierte o te hace crecer</a:t>
             </a:r>
           </a:p>
         </p:txBody>
@@ -7021,7 +7509,7 @@
                 </a:solidFill>
                 <a:latin typeface="Nunito Sans"/>
               </a:rPr>
-              <a:t>BLOQUE 1 · UN MUNDO CONECTADO</a:t>
+              <a:t>BLOQUE 1 · OCIO Y ADICCIÓN</a:t>
             </a:r>
           </a:p>
         </p:txBody>
@@ -7060,7 +7548,7 @@
                 </a:solidFill>
                 <a:latin typeface="Fredoka"/>
               </a:rPr>
-              <a:t>Glocal</a:t>
+              <a:t>Adicción</a:t>
             </a:r>
           </a:p>
         </p:txBody>
@@ -7142,7 +7630,7 @@
                 </a:solidFill>
                 <a:latin typeface="Nunito Sans"/>
               </a:rPr>
-              <a:t>Es lo global mezclado con lo local: lo que llega de todo el mundo se vive a nuestra manera.</a:t>
+              <a:t>Es perder el control sobre un consumo o una conducta: sigues aunque te haga daño y te cuesta mucho parar.</a:t>
             </a:r>
           </a:p>
         </p:txBody>
@@ -7184,13 +7672,22 @@
               <a:t>• </a:t>
             </a:r>
             <a:r>
+              <a:rPr sz="2800" b="1">
+                <a:solidFill>
+                  <a:srgbClr val="1F2A44"/>
+                </a:solidFill>
+                <a:latin typeface="Nunito Sans"/>
+              </a:rPr>
+              <a:t>Con sustancia:</a:t>
+            </a:r>
+            <a:r>
               <a:rPr sz="2800" b="0">
                 <a:solidFill>
                   <a:srgbClr val="1F2A44"/>
                 </a:solidFill>
                 <a:latin typeface="Nunito Sans"/>
               </a:rPr>
-              <a:t>Una serie de otro país, doblada al euskera</a:t>
+              <a:t> alcohol, nicotina (tabaco y vapeo), cannabis…</a:t>
             </a:r>
           </a:p>
           <a:p>
@@ -7209,13 +7706,22 @@
               <a:t>• </a:t>
             </a:r>
             <a:r>
+              <a:rPr sz="2800" b="1">
+                <a:solidFill>
+                  <a:srgbClr val="1F2A44"/>
+                </a:solidFill>
+                <a:latin typeface="Nunito Sans"/>
+              </a:rPr>
+              <a:t>Sin sustancia:</a:t>
+            </a:r>
+            <a:r>
               <a:rPr sz="2800" b="0">
                 <a:solidFill>
                   <a:srgbClr val="1F2A44"/>
                 </a:solidFill>
                 <a:latin typeface="Nunito Sans"/>
               </a:rPr>
-              <a:t>Canciones en euskera con ritmos de todo el mundo</a:t>
+              <a:t> apuestas, videojuegos</a:t>
             </a:r>
           </a:p>
           <a:p>
@@ -7240,7 +7746,32 @@
                 </a:solidFill>
                 <a:latin typeface="Nunito Sans"/>
               </a:rPr>
-              <a:t>Una app mundial para quedar con tu cuadrilla</a:t>
+              <a:t>La OMS reconoce el trastorno por juego de apuestas y por videojuegos</a:t>
+            </a:r>
+          </a:p>
+          <a:p>
+            <a:pPr>
+              <a:spcAft>
+                <a:spcPts val="1260"/>
+              </a:spcAft>
+            </a:pPr>
+            <a:r>
+              <a:rPr sz="2800" b="1">
+                <a:solidFill>
+                  <a:srgbClr val="E8793A"/>
+                </a:solidFill>
+                <a:latin typeface="Nunito Sans"/>
+              </a:rPr>
+              <a:t>• </a:t>
+            </a:r>
+            <a:r>
+              <a:rPr sz="2800" b="0">
+                <a:solidFill>
+                  <a:srgbClr val="1F2A44"/>
+                </a:solidFill>
+                <a:latin typeface="Nunito Sans"/>
+              </a:rPr>
+              <a:t>«Adicción al móvil» no es un diagnóstico oficial: se dice «uso problemático»</a:t>
             </a:r>
           </a:p>
         </p:txBody>
@@ -7305,7 +7836,7 @@
                 </a:solidFill>
                 <a:latin typeface="Nunito Sans"/>
               </a:rPr>
-              <a:t>BLOQUE 1 · UN MUNDO CONECTADO</a:t>
+              <a:t>BLOQUE 1 · OCIO Y ADICCIÓN</a:t>
             </a:r>
           </a:p>
         </p:txBody>
@@ -7344,57 +7875,14 @@
                 </a:solidFill>
                 <a:latin typeface="Fredoka"/>
               </a:rPr>
-              <a:t>Migrar</a:t>
-            </a:r>
-          </a:p>
-        </p:txBody>
-      </p:sp>
-      <p:sp>
-        <p:nvSpPr>
-          <p:cNvPr id="4" name="Rectangle 3"/>
-          <p:cNvSpPr/>
-          <p:nvPr/>
-        </p:nvSpPr>
-        <p:spPr>
-          <a:xfrm>
-            <a:off x="640000" y="1650000"/>
-            <a:ext cx="10912000" cy="1150000"/>
-          </a:xfrm>
-          <a:prstGeom prst="rect">
-            <a:avLst/>
-          </a:prstGeom>
-          <a:solidFill>
-            <a:srgbClr val="EAF0F7"/>
-          </a:solidFill>
-          <a:ln>
-            <a:noFill/>
-          </a:ln>
-        </p:spPr>
-        <p:style>
-          <a:lnRef idx="1">
-            <a:schemeClr val="accent1"/>
-          </a:lnRef>
-          <a:fillRef idx="3">
-            <a:schemeClr val="accent1"/>
-          </a:fillRef>
-          <a:effectRef idx="2">
-            <a:schemeClr val="accent1"/>
-          </a:effectRef>
-          <a:fontRef idx="minor">
-            <a:schemeClr val="lt1"/>
-          </a:fontRef>
-        </p:style>
-        <p:txBody>
-          <a:bodyPr rtlCol="0" anchor="ctr"/>
-          <a:lstStyle/>
-          <a:p>
-            <a:pPr algn="ctr"/>
-          </a:p>
-        </p:txBody>
-      </p:sp>
-      <p:sp>
-        <p:nvSpPr>
-          <p:cNvPr id="5" name="TextBox 4"/>
+              <a:t>Señales de adicción</a:t>
+            </a:r>
+          </a:p>
+        </p:txBody>
+      </p:sp>
+      <p:sp>
+        <p:nvSpPr>
+          <p:cNvPr id="4" name="TextBox 3"/>
           <p:cNvSpPr txBox="1"/>
           <p:nvPr/>
         </p:nvSpPr>
@@ -7416,24 +7904,24 @@
           <a:p>
             <a:pPr>
               <a:spcAft>
-                <a:spcPts val="1260"/>
-              </a:spcAft>
-            </a:pPr>
-            <a:r>
-              <a:rPr sz="2800" b="1">
+                <a:spcPts val="1080"/>
+              </a:spcAft>
+            </a:pPr>
+            <a:r>
+              <a:rPr sz="2400" b="0">
                 <a:solidFill>
                   <a:srgbClr val="1F2A44"/>
                 </a:solidFill>
                 <a:latin typeface="Nunito Sans"/>
               </a:rPr>
-              <a:t>Es irse a vivir a otro país o a otra región durante mucho tiempo.</a:t>
-            </a:r>
-          </a:p>
-        </p:txBody>
-      </p:sp>
-      <p:sp>
-        <p:nvSpPr>
-          <p:cNvPr id="6" name="TextBox 5"/>
+              <a:t>Los médicos no miran solo las horas. Miran señales como estas:</a:t>
+            </a:r>
+          </a:p>
+        </p:txBody>
+      </p:sp>
+      <p:sp>
+        <p:nvSpPr>
+          <p:cNvPr id="5" name="TextBox 4"/>
           <p:cNvSpPr txBox="1"/>
           <p:nvPr/>
         </p:nvSpPr>
@@ -7474,7 +7962,7 @@
                 </a:solidFill>
                 <a:latin typeface="Nunito Sans"/>
               </a:rPr>
-              <a:t>Emigrar:</a:t>
+              <a:t>Pérdida de control:</a:t>
             </a:r>
             <a:r>
               <a:rPr sz="2800" b="0">
@@ -7483,7 +7971,7 @@
                 </a:solidFill>
                 <a:latin typeface="Nunito Sans"/>
               </a:rPr>
-              <a:t> salir del lugar donde vivías</a:t>
+              <a:t> quieres parar y no puedes</a:t>
             </a:r>
           </a:p>
           <a:p>
@@ -7508,7 +7996,7 @@
                 </a:solidFill>
                 <a:latin typeface="Nunito Sans"/>
               </a:rPr>
-              <a:t>Inmigrar:</a:t>
+              <a:t>Seguir aunque haga daño:</a:t>
             </a:r>
             <a:r>
               <a:rPr sz="2800" b="0">
@@ -7517,7 +8005,7 @@
                 </a:solidFill>
                 <a:latin typeface="Nunito Sans"/>
               </a:rPr>
-              <a:t> llegar a vivir a un lugar nuevo</a:t>
+              <a:t> al sueño, a los estudios, a la familia</a:t>
             </a:r>
           </a:p>
           <a:p>
@@ -7536,13 +8024,81 @@
               <a:t>• </a:t>
             </a:r>
             <a:r>
+              <a:rPr sz="2800" b="1">
+                <a:solidFill>
+                  <a:srgbClr val="1F2A44"/>
+                </a:solidFill>
+                <a:latin typeface="Nunito Sans"/>
+              </a:rPr>
+              <a:t>Tolerancia:</a:t>
+            </a:r>
+            <a:r>
               <a:rPr sz="2800" b="0">
                 <a:solidFill>
                   <a:srgbClr val="1F2A44"/>
                 </a:solidFill>
                 <a:latin typeface="Nunito Sans"/>
               </a:rPr>
-              <a:t>La misma persona es emigrante allí e inmigrante aquí</a:t>
+              <a:t> necesitas más para sentir lo mismo</a:t>
+            </a:r>
+          </a:p>
+          <a:p>
+            <a:pPr>
+              <a:spcAft>
+                <a:spcPts val="1260"/>
+              </a:spcAft>
+            </a:pPr>
+            <a:r>
+              <a:rPr sz="2800" b="1">
+                <a:solidFill>
+                  <a:srgbClr val="E8793A"/>
+                </a:solidFill>
+                <a:latin typeface="Nunito Sans"/>
+              </a:rPr>
+              <a:t>• </a:t>
+            </a:r>
+            <a:r>
+              <a:rPr sz="2800" b="1">
+                <a:solidFill>
+                  <a:srgbClr val="1F2A44"/>
+                </a:solidFill>
+                <a:latin typeface="Nunito Sans"/>
+              </a:rPr>
+              <a:t>Abstinencia:</a:t>
+            </a:r>
+            <a:r>
+              <a:rPr sz="2800" b="0">
+                <a:solidFill>
+                  <a:srgbClr val="1F2A44"/>
+                </a:solidFill>
+                <a:latin typeface="Nunito Sans"/>
+              </a:rPr>
+              <a:t> malestar, nervios o mal humor al dejarlo</a:t>
+            </a:r>
+          </a:p>
+          <a:p>
+            <a:pPr>
+              <a:spcAft>
+                <a:spcPts val="1260"/>
+              </a:spcAft>
+            </a:pPr>
+            <a:r>
+              <a:rPr sz="2800" b="1">
+                <a:solidFill>
+                  <a:srgbClr val="E8793A"/>
+                </a:solidFill>
+                <a:latin typeface="Nunito Sans"/>
+              </a:rPr>
+              <a:t>• </a:t>
+            </a:r>
+            <a:r>
+              <a:rPr sz="2800" b="0">
+                <a:solidFill>
+                  <a:srgbClr val="1F2A44"/>
+                </a:solidFill>
+                <a:latin typeface="Nunito Sans"/>
+              </a:rPr>
+              <a:t>Todo gira alrededor de eso y deja fuera lo demás</a:t>
             </a:r>
           </a:p>
         </p:txBody>
@@ -7561,7 +8117,7 @@
     <p:bg>
       <p:bgPr>
         <a:solidFill>
-          <a:srgbClr val="FBF7EF"/>
+          <a:srgbClr val="1F2A44"/>
         </a:solidFill>
         <a:effectLst/>
       </p:bgPr>
@@ -7581,8 +8137,8 @@
         </p:nvSpPr>
         <p:spPr>
           <a:xfrm>
-            <a:off x="640000" y="380000"/>
-            <a:ext cx="10912000" cy="420000"/>
+            <a:off x="640000" y="2300000"/>
+            <a:ext cx="10912000" cy="500000"/>
           </a:xfrm>
           <a:prstGeom prst="rect">
             <a:avLst/>
@@ -7597,17 +8153,17 @@
           <a:p>
             <a:pPr>
               <a:spcAft>
-                <a:spcPts val="630"/>
-              </a:spcAft>
-            </a:pPr>
-            <a:r>
-              <a:rPr sz="1400" b="1">
-                <a:solidFill>
-                  <a:srgbClr val="E8793A"/>
-                </a:solidFill>
-                <a:latin typeface="Nunito Sans"/>
-              </a:rPr>
-              <a:t>BLOQUE 1 · UN MUNDO CONECTADO</a:t>
+                <a:spcPts val="810"/>
+              </a:spcAft>
+            </a:pPr>
+            <a:r>
+              <a:rPr sz="1800" b="1">
+                <a:solidFill>
+                  <a:srgbClr val="F4B183"/>
+                </a:solidFill>
+                <a:latin typeface="Nunito Sans"/>
+              </a:rPr>
+              <a:t>BLOQUE 2</a:t>
             </a:r>
           </a:p>
         </p:txBody>
@@ -7620,7 +8176,7 @@
         </p:nvSpPr>
         <p:spPr>
           <a:xfrm>
-            <a:off x="640000" y="760000"/>
+            <a:off x="640000" y="2800000"/>
             <a:ext cx="10912000" cy="800000"/>
           </a:xfrm>
           <a:prstGeom prst="rect">
@@ -7636,215 +8192,17 @@
           <a:p>
             <a:pPr>
               <a:spcAft>
-                <a:spcPts val="1710"/>
-              </a:spcAft>
-            </a:pPr>
-            <a:r>
-              <a:rPr sz="3800" b="1">
-                <a:solidFill>
-                  <a:srgbClr val="1F2A44"/>
+                <a:spcPts val="2160"/>
+              </a:spcAft>
+            </a:pPr>
+            <a:r>
+              <a:rPr sz="4800" b="1">
+                <a:solidFill>
+                  <a:srgbClr val="FBF7EF"/>
                 </a:solidFill>
                 <a:latin typeface="Fredoka"/>
               </a:rPr>
-              <a:t>¿Por qué emigra la gente?</a:t>
-            </a:r>
-          </a:p>
-        </p:txBody>
-      </p:sp>
-      <p:sp>
-        <p:nvSpPr>
-          <p:cNvPr id="4" name="TextBox 3"/>
-          <p:cNvSpPr txBox="1"/>
-          <p:nvPr/>
-        </p:nvSpPr>
-        <p:spPr>
-          <a:xfrm>
-            <a:off x="840000" y="1730000"/>
-            <a:ext cx="10512000" cy="1000000"/>
-          </a:xfrm>
-          <a:prstGeom prst="rect">
-            <a:avLst/>
-          </a:prstGeom>
-          <a:noFill/>
-        </p:spPr>
-        <p:txBody>
-          <a:bodyPr wrap="square" anchor="ctr">
-            <a:spAutoFit/>
-          </a:bodyPr>
-          <a:lstStyle/>
-          <a:p>
-            <a:pPr>
-              <a:spcAft>
-                <a:spcPts val="1080"/>
-              </a:spcAft>
-            </a:pPr>
-            <a:r>
-              <a:rPr sz="2400" b="0">
-                <a:solidFill>
-                  <a:srgbClr val="1F2A44"/>
-                </a:solidFill>
-                <a:latin typeface="Nunito Sans"/>
-              </a:rPr>
-              <a:t>Casi siempre hay varias razones a la vez.</a:t>
-            </a:r>
-          </a:p>
-        </p:txBody>
-      </p:sp>
-      <p:sp>
-        <p:nvSpPr>
-          <p:cNvPr id="5" name="TextBox 4"/>
-          <p:cNvSpPr txBox="1"/>
-          <p:nvPr/>
-        </p:nvSpPr>
-        <p:spPr>
-          <a:xfrm>
-            <a:off x="640000" y="3000000"/>
-            <a:ext cx="10912000" cy="3458000"/>
-          </a:xfrm>
-          <a:prstGeom prst="rect">
-            <a:avLst/>
-          </a:prstGeom>
-          <a:noFill/>
-        </p:spPr>
-        <p:txBody>
-          <a:bodyPr wrap="square">
-            <a:spAutoFit/>
-          </a:bodyPr>
-          <a:lstStyle/>
-          <a:p>
-            <a:pPr>
-              <a:spcAft>
-                <a:spcPts val="1260"/>
-              </a:spcAft>
-            </a:pPr>
-            <a:r>
-              <a:rPr sz="2800" b="1">
-                <a:solidFill>
-                  <a:srgbClr val="E8793A"/>
-                </a:solidFill>
-                <a:latin typeface="Nunito Sans"/>
-              </a:rPr>
-              <a:t>• </a:t>
-            </a:r>
-            <a:r>
-              <a:rPr sz="2800" b="1">
-                <a:solidFill>
-                  <a:srgbClr val="1F2A44"/>
-                </a:solidFill>
-                <a:latin typeface="Nunito Sans"/>
-              </a:rPr>
-              <a:t>Trabajo:</a:t>
-            </a:r>
-            <a:r>
-              <a:rPr sz="2800" b="0">
-                <a:solidFill>
-                  <a:srgbClr val="1F2A44"/>
-                </a:solidFill>
-                <a:latin typeface="Nunito Sans"/>
-              </a:rPr>
-              <a:t> buscar un empleo o un sueldo mejor.</a:t>
-            </a:r>
-          </a:p>
-          <a:p>
-            <a:pPr>
-              <a:spcAft>
-                <a:spcPts val="1260"/>
-              </a:spcAft>
-            </a:pPr>
-            <a:r>
-              <a:rPr sz="2800" b="1">
-                <a:solidFill>
-                  <a:srgbClr val="E8793A"/>
-                </a:solidFill>
-                <a:latin typeface="Nunito Sans"/>
-              </a:rPr>
-              <a:t>• </a:t>
-            </a:r>
-            <a:r>
-              <a:rPr sz="2800" b="1">
-                <a:solidFill>
-                  <a:srgbClr val="1F2A44"/>
-                </a:solidFill>
-                <a:latin typeface="Nunito Sans"/>
-              </a:rPr>
-              <a:t>Guerra o persecución:</a:t>
-            </a:r>
-            <a:r>
-              <a:rPr sz="2800" b="0">
-                <a:solidFill>
-                  <a:srgbClr val="1F2A44"/>
-                </a:solidFill>
-                <a:latin typeface="Nunito Sans"/>
-              </a:rPr>
-              <a:t> huir para salvar la vida.</a:t>
-            </a:r>
-          </a:p>
-          <a:p>
-            <a:pPr>
-              <a:spcAft>
-                <a:spcPts val="1260"/>
-              </a:spcAft>
-            </a:pPr>
-            <a:r>
-              <a:rPr sz="2800" b="1">
-                <a:solidFill>
-                  <a:srgbClr val="E8793A"/>
-                </a:solidFill>
-                <a:latin typeface="Nunito Sans"/>
-              </a:rPr>
-              <a:t>• </a:t>
-            </a:r>
-            <a:r>
-              <a:rPr sz="2800" b="1">
-                <a:solidFill>
-                  <a:srgbClr val="1F2A44"/>
-                </a:solidFill>
-                <a:latin typeface="Nunito Sans"/>
-              </a:rPr>
-              <a:t>Clima y desastres:</a:t>
-            </a:r>
-            <a:r>
-              <a:rPr sz="2800" b="0">
-                <a:solidFill>
-                  <a:srgbClr val="1F2A44"/>
-                </a:solidFill>
-                <a:latin typeface="Nunito Sans"/>
-              </a:rPr>
-              <a:t> sequías, inundaciones, terremotos.</a:t>
-            </a:r>
-          </a:p>
-          <a:p>
-            <a:pPr>
-              <a:spcAft>
-                <a:spcPts val="1260"/>
-              </a:spcAft>
-            </a:pPr>
-            <a:r>
-              <a:rPr sz="2800" b="1">
-                <a:solidFill>
-                  <a:srgbClr val="E8793A"/>
-                </a:solidFill>
-                <a:latin typeface="Nunito Sans"/>
-              </a:rPr>
-              <a:t>• </a:t>
-            </a:r>
-            <a:r>
-              <a:rPr sz="2800" b="1">
-                <a:solidFill>
-                  <a:srgbClr val="1F2A44"/>
-                </a:solidFill>
-                <a:latin typeface="Nunito Sans"/>
-              </a:rPr>
-              <a:t>Familia y estudios:</a:t>
-            </a:r>
-            <a:r>
-              <a:rPr sz="2800" b="0">
-                <a:solidFill>
-                  <a:srgbClr val="1F2A44"/>
-                </a:solidFill>
-                <a:latin typeface="Nunito Sans"/>
-              </a:rPr>
-              <a:t> reunirse con los suyos, estudiar fuera.</a:t>
+              <a:t>Mitos y presión del grupo</a:t>
             </a:r>
           </a:p>
         </p:txBody>
